--- a/projects/测试DEMO/最终文档/ppt_slides/slide_01.pptx
+++ b/projects/测试DEMO/最终文档/ppt_slides/slide_01.pptx
@@ -134,7 +134,7 @@
             <c:idx val="0"/>
             <c:spPr>
               <a:solidFill>
-                <a:srgbClr val="A6A6A6"/>
+                <a:srgbClr val="2EA154"/>
               </a:solidFill>
             </c:spPr>
           </c:dPt>
@@ -142,43 +142,154 @@
             <c:idx val="1"/>
             <c:spPr>
               <a:solidFill>
-                <a:srgbClr val="0070C0"/>
+                <a:srgbClr val="D93A36"/>
               </a:solidFill>
             </c:spPr>
           </c:dPt>
+          <c:dPt>
+            <c:idx val="2"/>
+            <c:spPr>
+              <a:solidFill>
+                <a:srgbClr val="D93A36"/>
+              </a:solidFill>
+            </c:spPr>
+          </c:dPt>
+          <c:dLbls>
+            <c:dLbl>
+              <c:idx val="0"/>
+              <c:tx>
+                <c:rich>
+                  <a:bodyPr/>
+                  <a:lstStyle/>
+                  <a:p>
+                    <a:r>
+                      <a:t>30 min </a:t>
+                    </a:r>
+                  </a:p>
+                </c:rich>
+              </c:tx>
+              <c:txPr>
+                <a:bodyPr/>
+                <a:lstStyle/>
+                <a:p>
+                  <a:pPr>
+                    <a:defRPr sz="1000" b="1"/>
+                  </a:pPr>
+                </a:p>
+              </c:txPr>
+              <c:showLegendKey val="0"/>
+              <c:showVal val="1"/>
+              <c:showCatName val="0"/>
+              <c:showSerName val="0"/>
+              <c:showPercent val="0"/>
+              <c:showBubbleSize val="0"/>
+            </c:dLbl>
+            <c:dLbl>
+              <c:idx val="1"/>
+              <c:tx>
+                <c:rich>
+                  <a:bodyPr/>
+                  <a:lstStyle/>
+                  <a:p>
+                    <a:r>
+                      <a:t>&gt; 60 min </a:t>
+                    </a:r>
+                  </a:p>
+                </c:rich>
+              </c:tx>
+              <c:txPr>
+                <a:bodyPr/>
+                <a:lstStyle/>
+                <a:p>
+                  <a:pPr>
+                    <a:defRPr sz="1000" b="1">
+                      <a:solidFill>
+                        <a:srgbClr val="D93A36"/>
+                      </a:solidFill>
+                    </a:defRPr>
+                  </a:pPr>
+                </a:p>
+              </c:txPr>
+              <c:showLegendKey val="0"/>
+              <c:showVal val="1"/>
+              <c:showCatName val="0"/>
+              <c:showSerName val="0"/>
+              <c:showPercent val="0"/>
+              <c:showBubbleSize val="0"/>
+            </c:dLbl>
+            <c:dLbl>
+              <c:idx val="2"/>
+              <c:tx>
+                <c:rich>
+                  <a:bodyPr/>
+                  <a:lstStyle/>
+                  <a:p>
+                    <a:r>
+                      <a:t>60 min</a:t>
+                    </a:r>
+                  </a:p>
+                </c:rich>
+              </c:tx>
+              <c:txPr>
+                <a:bodyPr/>
+                <a:lstStyle/>
+                <a:p>
+                  <a:pPr>
+                    <a:defRPr sz="1000" b="1"/>
+                  </a:pPr>
+                </a:p>
+              </c:txPr>
+              <c:showLegendKey val="0"/>
+              <c:showVal val="1"/>
+              <c:showCatName val="0"/>
+              <c:showSerName val="0"/>
+              <c:showPercent val="0"/>
+              <c:showBubbleSize val="0"/>
+            </c:dLbl>
+            <c:showLegendKey val="0"/>
+            <c:showVal val="0"/>
+            <c:showCatName val="0"/>
+            <c:showSerName val="0"/>
+            <c:showPercent val="0"/>
+            <c:showBubbleSize val="0"/>
+            <c:showLeaderLines val="1"/>
+          </c:dLbls>
           <c:cat>
             <c:strRef>
-              <c:f>Sheet1!$A$2:$A$3</c:f>
+              <c:f>Sheet1!$A$2:$A$4</c:f>
               <c:strCache>
-                <c:ptCount val="2"/>
+                <c:ptCount val="3"/>
                 <c:pt idx="0">
-                  <c:v>手写/Copilot
-(Manual/AI)</c:v>
+                  <c:v>Claude Code</c:v>
                 </c:pt>
                 <c:pt idx="1">
-                  <c:v>Claude Code
-(AI)</c:v>
+                  <c:v>GitHub Copilot</c:v>
+                </c:pt>
+                <c:pt idx="2">
+                  <c:v>手写开发</c:v>
                 </c:pt>
               </c:strCache>
             </c:strRef>
           </c:cat>
           <c:val>
             <c:numRef>
-              <c:f>Sheet1!$B$2:$B$3</c:f>
+              <c:f>Sheet1!$B$2:$B$4</c:f>
               <c:numCache>
                 <c:formatCode>General</c:formatCode>
-                <c:ptCount val="2"/>
+                <c:ptCount val="3"/>
                 <c:pt idx="0">
-                  <c:v>60</c:v>
+                  <c:v>30</c:v>
                 </c:pt>
                 <c:pt idx="1">
-                  <c:v>30</c:v>
+                  <c:v>65</c:v>
+                </c:pt>
+                <c:pt idx="2">
+                  <c:v>60</c:v>
                 </c:pt>
               </c:numCache>
             </c:numRef>
           </c:val>
         </c:ser>
-        <c:gapWidth val="100"/>
         <c:axId val="-2068027336"/>
         <c:axId val="-2113994440"/>
       </c:barChart>
@@ -192,6 +303,19 @@
         <c:majorTickMark val="out"/>
         <c:minorTickMark val="none"/>
         <c:tickLblPos val="nextTo"/>
+        <c:txPr>
+          <a:bodyPr/>
+          <a:lstStyle/>
+          <a:p>
+            <a:pPr>
+              <a:defRPr sz="1100">
+                <a:solidFill>
+                  <a:srgbClr val="666666"/>
+                </a:solidFill>
+              </a:defRPr>
+            </a:pPr>
+          </a:p>
+        </c:txPr>
         <c:crossAx val="-2113994440"/>
         <c:crosses val="autoZero"/>
         <c:auto val="1"/>
@@ -201,15 +325,39 @@
       </c:catAx>
       <c:valAx>
         <c:axId val="-2113994440"/>
-        <c:scaling/>
+        <c:scaling>
+          <c:max val="70.0"/>
+        </c:scaling>
         <c:delete val="0"/>
         <c:axPos val="b"/>
-        <c:majorGridlines/>
+        <c:majorGridlines>
+          <c:spPr>
+            <a:ln>
+              <a:solidFill>
+                <a:srgbClr val="E5E5E5"/>
+              </a:solidFill>
+            </a:ln>
+          </c:spPr>
+        </c:majorGridlines>
         <c:majorTickMark val="out"/>
         <c:minorTickMark val="none"/>
         <c:tickLblPos val="nextTo"/>
+        <c:txPr>
+          <a:bodyPr/>
+          <a:lstStyle/>
+          <a:p>
+            <a:pPr>
+              <a:defRPr sz="1000">
+                <a:solidFill>
+                  <a:srgbClr val="666666"/>
+                </a:solidFill>
+              </a:defRPr>
+            </a:pPr>
+          </a:p>
+        </c:txPr>
         <c:crossAx val="-2068027336"/>
         <c:crosses val="autoZero"/>
+        <c:majorUnit val="15.0"/>
       </c:valAx>
     </c:plotArea>
     <c:dispBlanksAs val="gap"/>
@@ -3220,7 +3368,7 @@
         <p:spPr>
           <a:xfrm>
             <a:off x="457200" y="365760"/>
-            <a:ext cx="8229600" cy="731520"/>
+            <a:ext cx="7315200" cy="548640"/>
           </a:xfrm>
           <a:prstGeom prst="rect">
             <a:avLst/>
@@ -3233,13 +3381,14 @@
           </a:bodyPr>
           <a:lstStyle/>
           <a:p>
-            <a:pPr>
-              <a:defRPr sz="2800" b="1">
+            <a:r>
+              <a:rPr sz="2800" b="1">
+                <a:solidFill>
+                  <a:srgbClr val="1B2A49"/>
+                </a:solidFill>
                 <a:latin typeface="Microsoft YaHei"/>
-              </a:defRPr>
-            </a:pPr>
-            <a:r>
-              <a:t>简单场景：AI 初显 50% 提效潜力 ⚡</a:t>
+              </a:rPr>
+              <a:t>简单场景验证：Claude Code 胜出</a:t>
             </a:r>
           </a:p>
         </p:txBody>
@@ -3252,8 +3401,8 @@
         </p:nvSpPr>
         <p:spPr>
           <a:xfrm>
-            <a:off x="457200" y="1005840"/>
-            <a:ext cx="7315200" cy="457200"/>
+            <a:off x="457200" y="914400"/>
+            <a:ext cx="7315200" cy="365760"/>
           </a:xfrm>
           <a:prstGeom prst="rect">
             <a:avLst/>
@@ -3266,16 +3415,14 @@
           </a:bodyPr>
           <a:lstStyle/>
           <a:p>
-            <a:pPr>
-              <a:defRPr sz="1600">
-                <a:solidFill>
-                  <a:srgbClr val="555555"/>
+            <a:r>
+              <a:rPr sz="1600">
+                <a:solidFill>
+                  <a:srgbClr val="666666"/>
                 </a:solidFill>
                 <a:latin typeface="Microsoft YaHei"/>
-              </a:defRPr>
-            </a:pPr>
-            <a:r>
-              <a:t>案例A —— 标准 ALV 销售订单报表验证</a:t>
+              </a:rPr>
+              <a:t>销售订单报表查询（低复杂度）效率对比</a:t>
             </a:r>
           </a:p>
         </p:txBody>
@@ -3288,14 +3435,102 @@
         </p:nvSpPr>
         <p:spPr>
           <a:xfrm>
-            <a:off x="10789920" y="548640"/>
-            <a:ext cx="914400" cy="365760"/>
+            <a:off x="457200" y="1554480"/>
+            <a:ext cx="4937760" cy="4389120"/>
           </a:xfrm>
           <a:prstGeom prst="roundRect">
             <a:avLst/>
           </a:prstGeom>
           <a:solidFill>
-            <a:srgbClr val="E6F0FA"/>
+            <a:srgbClr val="FFFFFF"/>
+          </a:solidFill>
+          <a:ln w="12700">
+            <a:solidFill>
+              <a:srgbClr val="E5E5E5"/>
+            </a:solidFill>
+          </a:ln>
+        </p:spPr>
+        <p:style>
+          <a:lnRef idx="1">
+            <a:schemeClr val="accent1"/>
+          </a:lnRef>
+          <a:fillRef idx="3">
+            <a:schemeClr val="accent1"/>
+          </a:fillRef>
+          <a:effectRef idx="2">
+            <a:schemeClr val="accent1"/>
+          </a:effectRef>
+          <a:fontRef idx="minor">
+            <a:schemeClr val="lt1"/>
+          </a:fontRef>
+        </p:style>
+        <p:txBody>
+          <a:bodyPr rtlCol="0" anchor="ctr"/>
+          <a:lstStyle/>
+          <a:p>
+            <a:pPr algn="ctr"/>
+          </a:p>
+        </p:txBody>
+      </p:sp>
+      <p:sp>
+        <p:nvSpPr>
+          <p:cNvPr id="5" name="Oval 4"/>
+          <p:cNvSpPr/>
+          <p:nvPr/>
+        </p:nvSpPr>
+        <p:spPr>
+          <a:xfrm>
+            <a:off x="685800" y="1874519"/>
+            <a:ext cx="256032" cy="256032"/>
+          </a:xfrm>
+          <a:prstGeom prst="ellipse">
+            <a:avLst/>
+          </a:prstGeom>
+          <a:noFill/>
+          <a:ln w="19050">
+            <a:solidFill>
+              <a:srgbClr val="2EA154"/>
+            </a:solidFill>
+          </a:ln>
+        </p:spPr>
+        <p:style>
+          <a:lnRef idx="1">
+            <a:schemeClr val="accent1"/>
+          </a:lnRef>
+          <a:fillRef idx="3">
+            <a:schemeClr val="accent1"/>
+          </a:fillRef>
+          <a:effectRef idx="2">
+            <a:schemeClr val="accent1"/>
+          </a:effectRef>
+          <a:fontRef idx="minor">
+            <a:schemeClr val="lt1"/>
+          </a:fontRef>
+        </p:style>
+        <p:txBody>
+          <a:bodyPr rtlCol="0" anchor="ctr"/>
+          <a:lstStyle/>
+          <a:p>
+            <a:pPr algn="ctr"/>
+          </a:p>
+        </p:txBody>
+      </p:sp>
+      <p:sp>
+        <p:nvSpPr>
+          <p:cNvPr id="6" name="Up Arrow 5"/>
+          <p:cNvSpPr/>
+          <p:nvPr/>
+        </p:nvSpPr>
+        <p:spPr>
+          <a:xfrm>
+            <a:off x="768096" y="1920240"/>
+            <a:ext cx="91440" cy="164592"/>
+          </a:xfrm>
+          <a:prstGeom prst="upArrow">
+            <a:avLst/>
+          </a:prstGeom>
+          <a:solidFill>
+            <a:srgbClr val="2EA154"/>
           </a:solidFill>
           <a:ln>
             <a:noFill/>
@@ -3319,29 +3554,20 @@
           <a:bodyPr rtlCol="0" anchor="ctr"/>
           <a:lstStyle/>
           <a:p>
-            <a:pPr algn="ctr">
-              <a:defRPr sz="1200">
-                <a:solidFill>
-                  <a:srgbClr val="0070C0"/>
-                </a:solidFill>
-              </a:defRPr>
-            </a:pPr>
-            <a:r>
-              <a:t>P1 / 4</a:t>
-            </a:r>
-          </a:p>
-        </p:txBody>
-      </p:sp>
-      <p:sp>
-        <p:nvSpPr>
-          <p:cNvPr id="5" name="TextBox 4"/>
+            <a:pPr algn="ctr"/>
+          </a:p>
+        </p:txBody>
+      </p:sp>
+      <p:sp>
+        <p:nvSpPr>
+          <p:cNvPr id="7" name="TextBox 6"/>
           <p:cNvSpPr txBox="1"/>
           <p:nvPr/>
         </p:nvSpPr>
         <p:spPr>
           <a:xfrm>
-            <a:off x="457200" y="1828800"/>
-            <a:ext cx="2743200" cy="457200"/>
+            <a:off x="1097280" y="1783080"/>
+            <a:ext cx="4114800" cy="731520"/>
           </a:xfrm>
           <a:prstGeom prst="rect">
             <a:avLst/>
@@ -3349,443 +3575,91 @@
           <a:noFill/>
         </p:spPr>
         <p:txBody>
-          <a:bodyPr wrap="none">
+          <a:bodyPr wrap="square">
             <a:spAutoFit/>
           </a:bodyPr>
           <a:lstStyle/>
           <a:p>
             <a:pPr>
-              <a:defRPr sz="2000" b="1">
+              <a:lnSpc>
+                <a:spcPct val="130000"/>
+              </a:lnSpc>
+            </a:pPr>
+            <a:r>
+              <a:rPr sz="1300" b="1">
+                <a:solidFill>
+                  <a:srgbClr val="000000"/>
+                </a:solidFill>
                 <a:latin typeface="Microsoft YaHei"/>
-              </a:defRPr>
-            </a:pPr>
-            <a:r>
-              <a:t>核心要点</a:t>
-            </a:r>
-          </a:p>
-        </p:txBody>
-      </p:sp>
-      <p:sp>
-        <p:nvSpPr>
-          <p:cNvPr id="6" name="TextBox 5"/>
-          <p:cNvSpPr txBox="1"/>
+              </a:rPr>
+              <a:t>效率拐点：</a:t>
+            </a:r>
+            <a:r>
+              <a:rPr sz="1300">
+                <a:solidFill>
+                  <a:srgbClr val="000000"/>
+                </a:solidFill>
+                <a:latin typeface="Microsoft YaHei"/>
+              </a:rPr>
+              <a:t>Claude Code 耗时 </a:t>
+            </a:r>
+            <a:r>
+              <a:rPr sz="1300" b="1">
+                <a:solidFill>
+                  <a:srgbClr val="000000"/>
+                </a:solidFill>
+                <a:latin typeface="Microsoft YaHei"/>
+              </a:rPr>
+              <a:t>30 分钟</a:t>
+            </a:r>
+            <a:r>
+              <a:rPr sz="1300">
+                <a:solidFill>
+                  <a:srgbClr val="000000"/>
+                </a:solidFill>
+                <a:latin typeface="Microsoft YaHei"/>
+              </a:rPr>
+              <a:t>，较手写开发效率</a:t>
+            </a:r>
+            <a:r>
+              <a:rPr sz="1300" b="1">
+                <a:solidFill>
+                  <a:srgbClr val="000000"/>
+                </a:solidFill>
+                <a:latin typeface="Microsoft YaHei"/>
+              </a:rPr>
+              <a:t>提升 50%</a:t>
+            </a:r>
+            <a:r>
+              <a:rPr sz="1300">
+                <a:solidFill>
+                  <a:srgbClr val="000000"/>
+                </a:solidFill>
+                <a:latin typeface="Microsoft YaHei"/>
+              </a:rPr>
+              <a:t>。</a:t>
+            </a:r>
+          </a:p>
+        </p:txBody>
+      </p:sp>
+      <p:sp>
+        <p:nvSpPr>
+          <p:cNvPr id="8" name="Isosceles Triangle 7"/>
+          <p:cNvSpPr/>
           <p:nvPr/>
         </p:nvSpPr>
         <p:spPr>
           <a:xfrm>
-            <a:off x="457200" y="2"/>
-            <a:ext cx="548640" cy="548640"/>
+            <a:off x="685800" y="2788920"/>
+            <a:ext cx="256032" cy="256032"/>
           </a:xfrm>
-          <a:prstGeom prst="rect">
+          <a:prstGeom prst="triangle">
             <a:avLst/>
           </a:prstGeom>
           <a:noFill/>
-        </p:spPr>
-        <p:txBody>
-          <a:bodyPr wrap="none">
-            <a:spAutoFit/>
-          </a:bodyPr>
-          <a:lstStyle/>
-          <a:p>
-            <a:pPr>
-              <a:defRPr sz="2400"/>
-            </a:pPr>
-            <a:r>
-              <a:t>⚡</a:t>
-            </a:r>
-          </a:p>
-        </p:txBody>
-      </p:sp>
-      <p:sp>
-        <p:nvSpPr>
-          <p:cNvPr id="7" name="TextBox 6"/>
-          <p:cNvSpPr txBox="1"/>
-          <p:nvPr/>
-        </p:nvSpPr>
-        <p:spPr>
-          <a:xfrm>
-            <a:off x="1097280" y="2"/>
-            <a:ext cx="4389120" cy="731520"/>
-          </a:xfrm>
-          <a:prstGeom prst="rect">
-            <a:avLst/>
-          </a:prstGeom>
-          <a:noFill/>
-        </p:spPr>
-        <p:txBody>
-          <a:bodyPr wrap="square">
-            <a:spAutoFit/>
-          </a:bodyPr>
-          <a:lstStyle/>
-          <a:p>
-            <a:r>
-              <a:rPr b="1" sz="1400">
-                <a:solidFill>
-                  <a:srgbClr val="1F4E79"/>
-                </a:solidFill>
-                <a:latin typeface="Microsoft YaHei"/>
-              </a:rPr>
-              <a:t>1. 效率突破: </a:t>
-            </a:r>
-            <a:r>
-              <a:rPr sz="1400">
-                <a:solidFill>
-                  <a:srgbClr val="333333"/>
-                </a:solidFill>
-                <a:latin typeface="Microsoft YaHei"/>
-              </a:rPr>
-              <a:t>Claude Code 仅需 30 分钟完成开发，较手写提效 50%。</a:t>
-            </a:r>
-          </a:p>
-        </p:txBody>
-      </p:sp>
-      <p:cxnSp>
-        <p:nvCxnSpPr>
-          <p:cNvPr id="8" name="Connector 7"/>
-          <p:cNvCxnSpPr/>
-          <p:nvPr/>
-        </p:nvCxnSpPr>
-        <p:spPr>
-          <a:xfrm>
-            <a:off x="1097280" y="3.5500000000000003"/>
-            <a:ext cx="4389120" cy="0.0"/>
-          </a:xfrm>
-          <a:prstGeom prst="line">
-            <a:avLst/>
-          </a:prstGeom>
-          <a:ln>
-            <a:solidFill>
-              <a:srgbClr val="E0E0E0"/>
-            </a:solidFill>
-          </a:ln>
-        </p:spPr>
-        <p:style>
-          <a:lnRef idx="2">
-            <a:schemeClr val="accent1"/>
-          </a:lnRef>
-          <a:fillRef idx="0">
-            <a:schemeClr val="accent1"/>
-          </a:fillRef>
-          <a:effectRef idx="1">
-            <a:schemeClr val="accent1"/>
-          </a:effectRef>
-          <a:fontRef idx="minor">
-            <a:schemeClr val="tx1"/>
-          </a:fontRef>
-        </p:style>
-      </p:cxnSp>
-      <p:sp>
-        <p:nvSpPr>
-          <p:cNvPr id="9" name="TextBox 8"/>
-          <p:cNvSpPr txBox="1"/>
-          <p:nvPr/>
-        </p:nvSpPr>
-        <p:spPr>
-          <a:xfrm>
-            <a:off x="457200" y="3"/>
-            <a:ext cx="548640" cy="548640"/>
-          </a:xfrm>
-          <a:prstGeom prst="rect">
-            <a:avLst/>
-          </a:prstGeom>
-          <a:noFill/>
-        </p:spPr>
-        <p:txBody>
-          <a:bodyPr wrap="none">
-            <a:spAutoFit/>
-          </a:bodyPr>
-          <a:lstStyle/>
-          <a:p>
-            <a:pPr>
-              <a:defRPr sz="2400"/>
-            </a:pPr>
-            <a:r>
-              <a:t>🤖</a:t>
-            </a:r>
-          </a:p>
-        </p:txBody>
-      </p:sp>
-      <p:sp>
-        <p:nvSpPr>
-          <p:cNvPr id="10" name="TextBox 9"/>
-          <p:cNvSpPr txBox="1"/>
-          <p:nvPr/>
-        </p:nvSpPr>
-        <p:spPr>
-          <a:xfrm>
-            <a:off x="1097280" y="3"/>
-            <a:ext cx="4389120" cy="731520"/>
-          </a:xfrm>
-          <a:prstGeom prst="rect">
-            <a:avLst/>
-          </a:prstGeom>
-          <a:noFill/>
-        </p:spPr>
-        <p:txBody>
-          <a:bodyPr wrap="square">
-            <a:spAutoFit/>
-          </a:bodyPr>
-          <a:lstStyle/>
-          <a:p>
-            <a:r>
-              <a:rPr b="1" sz="1400">
-                <a:solidFill>
-                  <a:srgbClr val="1F4E79"/>
-                </a:solidFill>
-                <a:latin typeface="Microsoft YaHei"/>
-              </a:rPr>
-              <a:t>2. 工具差距: </a:t>
-            </a:r>
-            <a:r>
-              <a:rPr sz="1400">
-                <a:solidFill>
-                  <a:srgbClr val="333333"/>
-                </a:solidFill>
-                <a:latin typeface="Microsoft YaHei"/>
-              </a:rPr>
-              <a:t>GitHub Copilot 耗时与手写持平，且因 SQL 不兼容导致运行崩溃。</a:t>
-            </a:r>
-          </a:p>
-        </p:txBody>
-      </p:sp>
-      <p:cxnSp>
-        <p:nvCxnSpPr>
-          <p:cNvPr id="11" name="Connector 10"/>
-          <p:cNvCxnSpPr/>
-          <p:nvPr/>
-        </p:nvCxnSpPr>
-        <p:spPr>
-          <a:xfrm>
-            <a:off x="1097280" y="4.55"/>
-            <a:ext cx="4389120" cy="0.0"/>
-          </a:xfrm>
-          <a:prstGeom prst="line">
-            <a:avLst/>
-          </a:prstGeom>
-          <a:ln>
-            <a:solidFill>
-              <a:srgbClr val="E0E0E0"/>
-            </a:solidFill>
-          </a:ln>
-        </p:spPr>
-        <p:style>
-          <a:lnRef idx="2">
-            <a:schemeClr val="accent1"/>
-          </a:lnRef>
-          <a:fillRef idx="0">
-            <a:schemeClr val="accent1"/>
-          </a:fillRef>
-          <a:effectRef idx="1">
-            <a:schemeClr val="accent1"/>
-          </a:effectRef>
-          <a:fontRef idx="minor">
-            <a:schemeClr val="tx1"/>
-          </a:fontRef>
-        </p:style>
-      </p:cxnSp>
-      <p:sp>
-        <p:nvSpPr>
-          <p:cNvPr id="12" name="TextBox 11"/>
-          <p:cNvSpPr txBox="1"/>
-          <p:nvPr/>
-        </p:nvSpPr>
-        <p:spPr>
-          <a:xfrm>
-            <a:off x="457200" y="4"/>
-            <a:ext cx="548640" cy="548640"/>
-          </a:xfrm>
-          <a:prstGeom prst="rect">
-            <a:avLst/>
-          </a:prstGeom>
-          <a:noFill/>
-        </p:spPr>
-        <p:txBody>
-          <a:bodyPr wrap="none">
-            <a:spAutoFit/>
-          </a:bodyPr>
-          <a:lstStyle/>
-          <a:p>
-            <a:pPr>
-              <a:defRPr sz="2400"/>
-            </a:pPr>
-            <a:r>
-              <a:t>🔀</a:t>
-            </a:r>
-          </a:p>
-        </p:txBody>
-      </p:sp>
-      <p:sp>
-        <p:nvSpPr>
-          <p:cNvPr id="13" name="TextBox 12"/>
-          <p:cNvSpPr txBox="1"/>
-          <p:nvPr/>
-        </p:nvSpPr>
-        <p:spPr>
-          <a:xfrm>
-            <a:off x="1097280" y="4"/>
-            <a:ext cx="4389120" cy="731520"/>
-          </a:xfrm>
-          <a:prstGeom prst="rect">
-            <a:avLst/>
-          </a:prstGeom>
-          <a:noFill/>
-        </p:spPr>
-        <p:txBody>
-          <a:bodyPr wrap="square">
-            <a:spAutoFit/>
-          </a:bodyPr>
-          <a:lstStyle/>
-          <a:p>
-            <a:r>
-              <a:rPr b="1" sz="1400">
-                <a:solidFill>
-                  <a:srgbClr val="1F4E79"/>
-                </a:solidFill>
-                <a:latin typeface="Microsoft YaHei"/>
-              </a:rPr>
-              <a:t>3. 交互对比: </a:t>
-            </a:r>
-            <a:r>
-              <a:rPr sz="1400">
-                <a:solidFill>
-                  <a:srgbClr val="333333"/>
-                </a:solidFill>
-                <a:latin typeface="Microsoft YaHei"/>
-              </a:rPr>
-              <a:t>Claude 仅需 2 轮提示即可运行，Copilot 需 5 轮以上人工干预。</a:t>
-            </a:r>
-          </a:p>
-        </p:txBody>
-      </p:sp>
-      <p:cxnSp>
-        <p:nvCxnSpPr>
-          <p:cNvPr id="14" name="Connector 13"/>
-          <p:cNvCxnSpPr/>
-          <p:nvPr/>
-        </p:nvCxnSpPr>
-        <p:spPr>
-          <a:xfrm>
-            <a:off x="1097280" y="5.55"/>
-            <a:ext cx="4389120" cy="0.0"/>
-          </a:xfrm>
-          <a:prstGeom prst="line">
-            <a:avLst/>
-          </a:prstGeom>
-          <a:ln>
-            <a:solidFill>
-              <a:srgbClr val="E0E0E0"/>
-            </a:solidFill>
-          </a:ln>
-        </p:spPr>
-        <p:style>
-          <a:lnRef idx="2">
-            <a:schemeClr val="accent1"/>
-          </a:lnRef>
-          <a:fillRef idx="0">
-            <a:schemeClr val="accent1"/>
-          </a:fillRef>
-          <a:effectRef idx="1">
-            <a:schemeClr val="accent1"/>
-          </a:effectRef>
-          <a:fontRef idx="minor">
-            <a:schemeClr val="tx1"/>
-          </a:fontRef>
-        </p:style>
-      </p:cxnSp>
-      <p:sp>
-        <p:nvSpPr>
-          <p:cNvPr id="15" name="TextBox 14"/>
-          <p:cNvSpPr txBox="1"/>
-          <p:nvPr/>
-        </p:nvSpPr>
-        <p:spPr>
-          <a:xfrm>
-            <a:off x="457200" y="5"/>
-            <a:ext cx="548640" cy="548640"/>
-          </a:xfrm>
-          <a:prstGeom prst="rect">
-            <a:avLst/>
-          </a:prstGeom>
-          <a:noFill/>
-        </p:spPr>
-        <p:txBody>
-          <a:bodyPr wrap="none">
-            <a:spAutoFit/>
-          </a:bodyPr>
-          <a:lstStyle/>
-          <a:p>
-            <a:pPr>
-              <a:defRPr sz="2400"/>
-            </a:pPr>
-            <a:r>
-              <a:t>🔍</a:t>
-            </a:r>
-          </a:p>
-        </p:txBody>
-      </p:sp>
-      <p:sp>
-        <p:nvSpPr>
-          <p:cNvPr id="16" name="TextBox 15"/>
-          <p:cNvSpPr txBox="1"/>
-          <p:nvPr/>
-        </p:nvSpPr>
-        <p:spPr>
-          <a:xfrm>
-            <a:off x="1097280" y="5"/>
-            <a:ext cx="4389120" cy="731520"/>
-          </a:xfrm>
-          <a:prstGeom prst="rect">
-            <a:avLst/>
-          </a:prstGeom>
-          <a:noFill/>
-        </p:spPr>
-        <p:txBody>
-          <a:bodyPr wrap="square">
-            <a:spAutoFit/>
-          </a:bodyPr>
-          <a:lstStyle/>
-          <a:p>
-            <a:r>
-              <a:rPr b="1" sz="1400">
-                <a:solidFill>
-                  <a:srgbClr val="1F4E79"/>
-                </a:solidFill>
-                <a:latin typeface="Microsoft YaHei"/>
-              </a:rPr>
-              <a:t>4. 核心瓶颈: </a:t>
-            </a:r>
-            <a:r>
-              <a:rPr sz="1400">
-                <a:solidFill>
-                  <a:srgbClr val="333333"/>
-                </a:solidFill>
-                <a:latin typeface="Microsoft YaHei"/>
-              </a:rPr>
-              <a:t>[地址取数逻辑] 与 [过账状态字段] 是 AI 初始生成的共同盲区。</a:t>
-            </a:r>
-          </a:p>
-        </p:txBody>
-      </p:sp>
-      <p:sp>
-        <p:nvSpPr>
-          <p:cNvPr id="17" name="Rounded Rectangle 16"/>
-          <p:cNvSpPr/>
-          <p:nvPr/>
-        </p:nvSpPr>
-        <p:spPr>
-          <a:xfrm>
-            <a:off x="5943600" y="1645920"/>
-            <a:ext cx="5760720" cy="3840480"/>
-          </a:xfrm>
-          <a:prstGeom prst="roundRect">
-            <a:avLst/>
-          </a:prstGeom>
-          <a:solidFill>
-            <a:srgbClr val="F4F8FC"/>
-          </a:solidFill>
           <a:ln w="19050">
             <a:solidFill>
-              <a:srgbClr val="BDD7EE"/>
+              <a:srgbClr val="D93A36"/>
             </a:solidFill>
           </a:ln>
         </p:spPr>
@@ -3813,14 +3687,14 @@
       </p:sp>
       <p:sp>
         <p:nvSpPr>
-          <p:cNvPr id="18" name="TextBox 17"/>
+          <p:cNvPr id="9" name="TextBox 8"/>
           <p:cNvSpPr txBox="1"/>
           <p:nvPr/>
         </p:nvSpPr>
         <p:spPr>
           <a:xfrm>
-            <a:off x="6126480" y="1828800"/>
-            <a:ext cx="3657600" cy="457200"/>
+            <a:off x="685800" y="2834640"/>
+            <a:ext cx="256032" cy="256032"/>
           </a:xfrm>
           <a:prstGeom prst="rect">
             <a:avLst/>
@@ -3833,45 +3707,28 @@
           </a:bodyPr>
           <a:lstStyle/>
           <a:p>
-            <a:pPr>
-              <a:defRPr sz="1600" b="1">
-                <a:latin typeface="Microsoft YaHei"/>
-              </a:defRPr>
-            </a:pPr>
-            <a:r>
-              <a:t>开发耗时对比 (分钟)</a:t>
-            </a:r>
-          </a:p>
-        </p:txBody>
-      </p:sp>
-      <p:graphicFrame>
-        <p:nvGraphicFramePr>
-          <p:cNvPr id="19" name="Chart 18"/>
-          <p:cNvGraphicFramePr>
-            <a:graphicFrameLocks noGrp="1"/>
-          </p:cNvGraphicFramePr>
-          <p:nvPr/>
-        </p:nvGraphicFramePr>
-        <p:xfrm>
-          <a:off x="6035040" y="2560320"/>
-          <a:ext cx="5303520" cy="2286000"/>
-        </p:xfrm>
-        <a:graphic>
-          <a:graphicData uri="http://schemas.openxmlformats.org/drawingml/2006/chart">
-            <c:chart xmlns:c="http://schemas.openxmlformats.org/drawingml/2006/chart" r:id="rId2"/>
-          </a:graphicData>
-        </a:graphic>
-      </p:graphicFrame>
-      <p:sp>
-        <p:nvSpPr>
-          <p:cNvPr id="20" name="TextBox 19"/>
+            <a:pPr algn="ctr"/>
+            <a:r>
+              <a:rPr sz="1200" b="1">
+                <a:solidFill>
+                  <a:srgbClr val="D93A36"/>
+                </a:solidFill>
+              </a:rPr>
+              <a:t>!</a:t>
+            </a:r>
+          </a:p>
+        </p:txBody>
+      </p:sp>
+      <p:sp>
+        <p:nvSpPr>
+          <p:cNvPr id="10" name="TextBox 9"/>
           <p:cNvSpPr txBox="1"/>
           <p:nvPr/>
         </p:nvSpPr>
         <p:spPr>
           <a:xfrm>
-            <a:off x="10881360" y="3794760"/>
-            <a:ext cx="914400" cy="365760"/>
+            <a:off x="1097280" y="2697480"/>
+            <a:ext cx="4114800" cy="731520"/>
           </a:xfrm>
           <a:prstGeom prst="rect">
             <a:avLst/>
@@ -3879,75 +3736,91 @@
           <a:noFill/>
         </p:spPr>
         <p:txBody>
-          <a:bodyPr wrap="none">
+          <a:bodyPr wrap="square">
             <a:spAutoFit/>
           </a:bodyPr>
           <a:lstStyle/>
           <a:p>
             <a:pPr>
-              <a:defRPr sz="1400">
+              <a:lnSpc>
+                <a:spcPct val="130000"/>
+              </a:lnSpc>
+            </a:pPr>
+            <a:r>
+              <a:rPr sz="1300" b="1">
+                <a:solidFill>
+                  <a:srgbClr val="000000"/>
+                </a:solidFill>
                 <a:latin typeface="Microsoft YaHei"/>
-              </a:defRPr>
-            </a:pPr>
-            <a:r>
-              <a:t>⚠️ 60</a:t>
-            </a:r>
-          </a:p>
-        </p:txBody>
-      </p:sp>
-      <p:sp>
-        <p:nvSpPr>
-          <p:cNvPr id="21" name="TextBox 20"/>
-          <p:cNvSpPr txBox="1"/>
+              </a:rPr>
+              <a:t>稳定性差异：</a:t>
+            </a:r>
+            <a:r>
+              <a:rPr sz="1300">
+                <a:solidFill>
+                  <a:srgbClr val="000000"/>
+                </a:solidFill>
+                <a:latin typeface="Microsoft YaHei"/>
+              </a:rPr>
+              <a:t>GitHub Copilot 运行出现 </a:t>
+            </a:r>
+            <a:r>
+              <a:rPr sz="1300" b="1">
+                <a:solidFill>
+                  <a:srgbClr val="D93A36"/>
+                </a:solidFill>
+                <a:latin typeface="Microsoft YaHei"/>
+              </a:rPr>
+              <a:t>Short Dump</a:t>
+            </a:r>
+            <a:r>
+              <a:rPr sz="1300">
+                <a:solidFill>
+                  <a:srgbClr val="000000"/>
+                </a:solidFill>
+                <a:latin typeface="Microsoft YaHei"/>
+              </a:rPr>
+              <a:t>，而 Claude Code </a:t>
+            </a:r>
+            <a:r>
+              <a:rPr sz="1300" b="1">
+                <a:solidFill>
+                  <a:srgbClr val="2EA154"/>
+                </a:solidFill>
+                <a:latin typeface="Microsoft YaHei"/>
+              </a:rPr>
+              <a:t>运行正常</a:t>
+            </a:r>
+            <a:r>
+              <a:rPr sz="1300">
+                <a:solidFill>
+                  <a:srgbClr val="000000"/>
+                </a:solidFill>
+                <a:latin typeface="Microsoft YaHei"/>
+              </a:rPr>
+              <a:t>。</a:t>
+            </a:r>
+          </a:p>
+        </p:txBody>
+      </p:sp>
+      <p:sp>
+        <p:nvSpPr>
+          <p:cNvPr id="11" name="Rectangular Callout 10"/>
+          <p:cNvSpPr/>
           <p:nvPr/>
         </p:nvSpPr>
         <p:spPr>
           <a:xfrm>
-            <a:off x="8778240" y="2971800"/>
-            <a:ext cx="914400" cy="365760"/>
+            <a:off x="685800" y="3749039"/>
+            <a:ext cx="201168" cy="164592"/>
           </a:xfrm>
-          <a:prstGeom prst="rect">
+          <a:prstGeom prst="wedgeRectCallout">
             <a:avLst/>
           </a:prstGeom>
           <a:noFill/>
-        </p:spPr>
-        <p:txBody>
-          <a:bodyPr wrap="none">
-            <a:spAutoFit/>
-          </a:bodyPr>
-          <a:lstStyle/>
-          <a:p>
-            <a:pPr>
-              <a:defRPr sz="1400">
-                <a:latin typeface="Microsoft YaHei"/>
-              </a:defRPr>
-            </a:pPr>
-            <a:r>
-              <a:t>⚡ 30</a:t>
-            </a:r>
-          </a:p>
-        </p:txBody>
-      </p:sp>
-      <p:sp>
-        <p:nvSpPr>
-          <p:cNvPr id="22" name="Rounded Rectangular Callout 21"/>
-          <p:cNvSpPr/>
-          <p:nvPr/>
-        </p:nvSpPr>
-        <p:spPr>
-          <a:xfrm>
-            <a:off x="8321040" y="2194560"/>
-            <a:ext cx="1463040" cy="548640"/>
-          </a:xfrm>
-          <a:prstGeom prst="wedgeRoundRectCallout">
-            <a:avLst/>
-          </a:prstGeom>
-          <a:solidFill>
-            <a:srgbClr val="E6F0FA"/>
-          </a:solidFill>
-          <a:ln>
+          <a:ln w="19050">
             <a:solidFill>
-              <a:srgbClr val="BDD7EE"/>
+              <a:srgbClr val="4A86C8"/>
             </a:solidFill>
           </a:ln>
         </p:spPr>
@@ -3969,76 +3842,28 @@
           <a:bodyPr rtlCol="0" anchor="ctr"/>
           <a:lstStyle/>
           <a:p>
-            <a:pPr algn="ctr">
-              <a:defRPr sz="1800" b="1">
-                <a:solidFill>
-                  <a:srgbClr val="0070C0"/>
-                </a:solidFill>
-                <a:latin typeface="Microsoft YaHei"/>
-              </a:defRPr>
-            </a:pPr>
-            <a:r>
-              <a:t>50% 提效</a:t>
-            </a:r>
-          </a:p>
-        </p:txBody>
-      </p:sp>
-      <p:sp>
-        <p:nvSpPr>
-          <p:cNvPr id="23" name="TextBox 22"/>
-          <p:cNvSpPr txBox="1"/>
+            <a:pPr algn="ctr"/>
+          </a:p>
+        </p:txBody>
+      </p:sp>
+      <p:sp>
+        <p:nvSpPr>
+          <p:cNvPr id="12" name="Rectangular Callout 11"/>
+          <p:cNvSpPr/>
           <p:nvPr/>
         </p:nvSpPr>
         <p:spPr>
           <a:xfrm>
-            <a:off x="9418320" y="4206240"/>
-            <a:ext cx="2286000" cy="365760"/>
+            <a:off x="749808" y="3822191"/>
+            <a:ext cx="201168" cy="164592"/>
           </a:xfrm>
-          <a:prstGeom prst="rect">
+          <a:prstGeom prst="wedgeRectCallout">
             <a:avLst/>
           </a:prstGeom>
           <a:noFill/>
-        </p:spPr>
-        <p:txBody>
-          <a:bodyPr wrap="none">
-            <a:spAutoFit/>
-          </a:bodyPr>
-          <a:lstStyle/>
-          <a:p>
-            <a:pPr>
-              <a:defRPr sz="1000">
-                <a:solidFill>
-                  <a:srgbClr val="ED7D31"/>
-                </a:solidFill>
-                <a:latin typeface="Microsoft YaHei"/>
-              </a:defRPr>
-            </a:pPr>
-            <a:r>
-              <a:t>SQL 不兼容/运行崩溃</a:t>
-            </a:r>
-          </a:p>
-        </p:txBody>
-      </p:sp>
-      <p:sp>
-        <p:nvSpPr>
-          <p:cNvPr id="24" name="Rounded Rectangle 23"/>
-          <p:cNvSpPr/>
-          <p:nvPr/>
-        </p:nvSpPr>
-        <p:spPr>
-          <a:xfrm>
-            <a:off x="5943600" y="5669280"/>
-            <a:ext cx="5760720" cy="731520"/>
-          </a:xfrm>
-          <a:prstGeom prst="roundRect">
-            <a:avLst/>
-          </a:prstGeom>
-          <a:solidFill>
-            <a:srgbClr val="F4F8FC"/>
-          </a:solidFill>
           <a:ln w="19050">
             <a:solidFill>
-              <a:srgbClr val="BDD7EE"/>
+              <a:srgbClr val="4A86C8"/>
             </a:solidFill>
           </a:ln>
         </p:spPr>
@@ -4066,14 +3891,14 @@
       </p:sp>
       <p:sp>
         <p:nvSpPr>
-          <p:cNvPr id="25" name="TextBox 24"/>
+          <p:cNvPr id="13" name="TextBox 12"/>
           <p:cNvSpPr txBox="1"/>
           <p:nvPr/>
         </p:nvSpPr>
         <p:spPr>
           <a:xfrm>
-            <a:off x="5943600" y="5806440"/>
-            <a:ext cx="5760720" cy="457200"/>
+            <a:off x="1097280" y="3611880"/>
+            <a:ext cx="4114800" cy="731520"/>
           </a:xfrm>
           <a:prstGeom prst="rect">
             <a:avLst/>
@@ -4081,29 +3906,777 @@
           <a:noFill/>
         </p:spPr>
         <p:txBody>
+          <a:bodyPr wrap="square">
+            <a:spAutoFit/>
+          </a:bodyPr>
+          <a:lstStyle/>
+          <a:p>
+            <a:pPr>
+              <a:lnSpc>
+                <a:spcPct val="130000"/>
+              </a:lnSpc>
+            </a:pPr>
+            <a:r>
+              <a:rPr sz="1300" b="1">
+                <a:solidFill>
+                  <a:srgbClr val="000000"/>
+                </a:solidFill>
+                <a:latin typeface="Microsoft YaHei"/>
+              </a:rPr>
+              <a:t>交互成本：</a:t>
+            </a:r>
+            <a:r>
+              <a:rPr sz="1300">
+                <a:solidFill>
+                  <a:srgbClr val="000000"/>
+                </a:solidFill>
+                <a:latin typeface="Microsoft YaHei"/>
+              </a:rPr>
+              <a:t>Claude Code 仅需 </a:t>
+            </a:r>
+            <a:r>
+              <a:rPr sz="1300" b="1">
+                <a:solidFill>
+                  <a:srgbClr val="000000"/>
+                </a:solidFill>
+                <a:latin typeface="Microsoft YaHei"/>
+              </a:rPr>
+              <a:t>2 轮</a:t>
+            </a:r>
+            <a:r>
+              <a:rPr sz="1300">
+                <a:solidFill>
+                  <a:srgbClr val="000000"/>
+                </a:solidFill>
+                <a:latin typeface="Microsoft YaHei"/>
+              </a:rPr>
+              <a:t>人工干预，远优于 Copilot 的 </a:t>
+            </a:r>
+            <a:r>
+              <a:rPr sz="1300" b="1">
+                <a:solidFill>
+                  <a:srgbClr val="000000"/>
+                </a:solidFill>
+                <a:latin typeface="Microsoft YaHei"/>
+              </a:rPr>
+              <a:t>5 轮</a:t>
+            </a:r>
+            <a:r>
+              <a:rPr sz="1300">
+                <a:solidFill>
+                  <a:srgbClr val="000000"/>
+                </a:solidFill>
+                <a:latin typeface="Microsoft YaHei"/>
+              </a:rPr>
+              <a:t>以上。</a:t>
+            </a:r>
+          </a:p>
+        </p:txBody>
+      </p:sp>
+      <p:sp>
+        <p:nvSpPr>
+          <p:cNvPr id="14" name="Rounded Rectangle 13"/>
+          <p:cNvSpPr/>
+          <p:nvPr/>
+        </p:nvSpPr>
+        <p:spPr>
+          <a:xfrm rot="2700000">
+            <a:off x="713232" y="4709160"/>
+            <a:ext cx="164592" cy="91440"/>
+          </a:xfrm>
+          <a:prstGeom prst="roundRect">
+            <a:avLst/>
+          </a:prstGeom>
+          <a:noFill/>
+          <a:ln w="19050">
+            <a:solidFill>
+              <a:srgbClr val="999999"/>
+            </a:solidFill>
+          </a:ln>
+        </p:spPr>
+        <p:style>
+          <a:lnRef idx="1">
+            <a:schemeClr val="accent1"/>
+          </a:lnRef>
+          <a:fillRef idx="3">
+            <a:schemeClr val="accent1"/>
+          </a:fillRef>
+          <a:effectRef idx="2">
+            <a:schemeClr val="accent1"/>
+          </a:effectRef>
+          <a:fontRef idx="minor">
+            <a:schemeClr val="lt1"/>
+          </a:fontRef>
+        </p:style>
+        <p:txBody>
+          <a:bodyPr rtlCol="0" anchor="ctr"/>
+          <a:lstStyle/>
+          <a:p>
+            <a:pPr algn="ctr"/>
+          </a:p>
+        </p:txBody>
+      </p:sp>
+      <p:sp>
+        <p:nvSpPr>
+          <p:cNvPr id="15" name="Rounded Rectangle 14"/>
+          <p:cNvSpPr/>
+          <p:nvPr/>
+        </p:nvSpPr>
+        <p:spPr>
+          <a:xfrm rot="2700000">
+            <a:off x="786384" y="4782312"/>
+            <a:ext cx="164592" cy="91440"/>
+          </a:xfrm>
+          <a:prstGeom prst="roundRect">
+            <a:avLst/>
+          </a:prstGeom>
+          <a:noFill/>
+          <a:ln w="19050">
+            <a:solidFill>
+              <a:srgbClr val="999999"/>
+            </a:solidFill>
+          </a:ln>
+        </p:spPr>
+        <p:style>
+          <a:lnRef idx="1">
+            <a:schemeClr val="accent1"/>
+          </a:lnRef>
+          <a:fillRef idx="3">
+            <a:schemeClr val="accent1"/>
+          </a:fillRef>
+          <a:effectRef idx="2">
+            <a:schemeClr val="accent1"/>
+          </a:effectRef>
+          <a:fontRef idx="minor">
+            <a:schemeClr val="lt1"/>
+          </a:fontRef>
+        </p:style>
+        <p:txBody>
+          <a:bodyPr rtlCol="0" anchor="ctr"/>
+          <a:lstStyle/>
+          <a:p>
+            <a:pPr algn="ctr"/>
+          </a:p>
+        </p:txBody>
+      </p:sp>
+      <p:sp>
+        <p:nvSpPr>
+          <p:cNvPr id="16" name="TextBox 15"/>
+          <p:cNvSpPr txBox="1"/>
+          <p:nvPr/>
+        </p:nvSpPr>
+        <p:spPr>
+          <a:xfrm>
+            <a:off x="1097280" y="4526280"/>
+            <a:ext cx="4114800" cy="731520"/>
+          </a:xfrm>
+          <a:prstGeom prst="rect">
+            <a:avLst/>
+          </a:prstGeom>
+          <a:noFill/>
+        </p:spPr>
+        <p:txBody>
+          <a:bodyPr wrap="square">
+            <a:spAutoFit/>
+          </a:bodyPr>
+          <a:lstStyle/>
+          <a:p>
+            <a:pPr>
+              <a:lnSpc>
+                <a:spcPct val="130000"/>
+              </a:lnSpc>
+            </a:pPr>
+            <a:r>
+              <a:rPr sz="1300" b="1">
+                <a:solidFill>
+                  <a:srgbClr val="000000"/>
+                </a:solidFill>
+                <a:latin typeface="Microsoft YaHei"/>
+              </a:rPr>
+              <a:t>核心瓶颈：</a:t>
+            </a:r>
+            <a:r>
+              <a:rPr sz="1300">
+                <a:solidFill>
+                  <a:srgbClr val="000000"/>
+                </a:solidFill>
+                <a:latin typeface="Microsoft YaHei"/>
+              </a:rPr>
+              <a:t>两者初次生成均不可直接运行，仍需人工修正 </a:t>
+            </a:r>
+            <a:r>
+              <a:rPr sz="1300" b="1">
+                <a:solidFill>
+                  <a:srgbClr val="000000"/>
+                </a:solidFill>
+                <a:latin typeface="Microsoft YaHei"/>
+              </a:rPr>
+              <a:t>SQL</a:t>
+            </a:r>
+            <a:r>
+              <a:rPr sz="1300">
+                <a:solidFill>
+                  <a:srgbClr val="000000"/>
+                </a:solidFill>
+                <a:latin typeface="Microsoft YaHei"/>
+              </a:rPr>
+              <a:t> 逻辑。</a:t>
+            </a:r>
+          </a:p>
+        </p:txBody>
+      </p:sp>
+      <p:sp>
+        <p:nvSpPr>
+          <p:cNvPr id="17" name="TextBox 16"/>
+          <p:cNvSpPr txBox="1"/>
+          <p:nvPr/>
+        </p:nvSpPr>
+        <p:spPr>
+          <a:xfrm>
+            <a:off x="5852160" y="1554480"/>
+            <a:ext cx="3657600" cy="365760"/>
+          </a:xfrm>
+          <a:prstGeom prst="rect">
+            <a:avLst/>
+          </a:prstGeom>
+          <a:noFill/>
+        </p:spPr>
+        <p:txBody>
           <a:bodyPr wrap="none">
             <a:spAutoFit/>
           </a:bodyPr>
           <a:lstStyle/>
           <a:p>
-            <a:pPr algn="ctr"/>
-            <a:r>
-              <a:rPr sz="2200" b="1">
-                <a:solidFill>
-                  <a:srgbClr val="333333"/>
-                </a:solidFill>
+            <a:r>
+              <a:rPr sz="1400" b="1">
                 <a:latin typeface="Microsoft YaHei"/>
               </a:rPr>
-              <a:t>✔️ ⚡ AI 初显 </a:t>
-            </a:r>
-            <a:r>
-              <a:rPr sz="2200" b="1">
-                <a:solidFill>
-                  <a:srgbClr val="0070C0"/>
-                </a:solidFill>
+              <a:t>开发耗时对比（分钟）</a:t>
+            </a:r>
+          </a:p>
+        </p:txBody>
+      </p:sp>
+      <p:graphicFrame>
+        <p:nvGraphicFramePr>
+          <p:cNvPr id="18" name="Chart 17"/>
+          <p:cNvGraphicFramePr>
+            <a:graphicFrameLocks noGrp="1"/>
+          </p:cNvGraphicFramePr>
+          <p:nvPr/>
+        </p:nvGraphicFramePr>
+        <p:xfrm>
+          <a:off x="5852160" y="2011680"/>
+          <a:ext cx="5852160" cy="1828800"/>
+        </p:xfrm>
+        <a:graphic>
+          <a:graphicData uri="http://schemas.openxmlformats.org/drawingml/2006/chart">
+            <c:chart xmlns:c="http://schemas.openxmlformats.org/drawingml/2006/chart" r:id="rId2"/>
+          </a:graphicData>
+        </a:graphic>
+      </p:graphicFrame>
+      <p:sp>
+        <p:nvSpPr>
+          <p:cNvPr id="19" name="Rounded Rectangle 18"/>
+          <p:cNvSpPr/>
+          <p:nvPr/>
+        </p:nvSpPr>
+        <p:spPr>
+          <a:xfrm>
+            <a:off x="5852160" y="4114800"/>
+            <a:ext cx="2377440" cy="1828800"/>
+          </a:xfrm>
+          <a:prstGeom prst="roundRect">
+            <a:avLst/>
+          </a:prstGeom>
+          <a:solidFill>
+            <a:srgbClr val="FFFFFF"/>
+          </a:solidFill>
+          <a:ln>
+            <a:solidFill>
+              <a:srgbClr val="E5E5E5"/>
+            </a:solidFill>
+          </a:ln>
+        </p:spPr>
+        <p:style>
+          <a:lnRef idx="1">
+            <a:schemeClr val="accent1"/>
+          </a:lnRef>
+          <a:fillRef idx="3">
+            <a:schemeClr val="accent1"/>
+          </a:fillRef>
+          <a:effectRef idx="2">
+            <a:schemeClr val="accent1"/>
+          </a:effectRef>
+          <a:fontRef idx="minor">
+            <a:schemeClr val="lt1"/>
+          </a:fontRef>
+        </p:style>
+        <p:txBody>
+          <a:bodyPr rtlCol="0" anchor="ctr"/>
+          <a:lstStyle/>
+          <a:p>
+            <a:pPr algn="ctr"/>
+          </a:p>
+        </p:txBody>
+      </p:sp>
+      <p:sp>
+        <p:nvSpPr>
+          <p:cNvPr id="20" name="TextBox 19"/>
+          <p:cNvSpPr txBox="1"/>
+          <p:nvPr/>
+        </p:nvSpPr>
+        <p:spPr>
+          <a:xfrm>
+            <a:off x="5943600" y="4389120"/>
+            <a:ext cx="1828800" cy="548640"/>
+          </a:xfrm>
+          <a:prstGeom prst="rect">
+            <a:avLst/>
+          </a:prstGeom>
+          <a:noFill/>
+        </p:spPr>
+        <p:txBody>
+          <a:bodyPr wrap="none">
+            <a:spAutoFit/>
+          </a:bodyPr>
+          <a:lstStyle/>
+          <a:p>
+            <a:r>
+              <a:rPr sz="4000" b="1">
+                <a:solidFill>
+                  <a:srgbClr val="2EA154"/>
+                </a:solidFill>
+              </a:rPr>
+              <a:t>50%</a:t>
+            </a:r>
+          </a:p>
+        </p:txBody>
+      </p:sp>
+      <p:sp>
+        <p:nvSpPr>
+          <p:cNvPr id="21" name="TextBox 20"/>
+          <p:cNvSpPr txBox="1"/>
+          <p:nvPr/>
+        </p:nvSpPr>
+        <p:spPr>
+          <a:xfrm>
+            <a:off x="5943600" y="5029200"/>
+            <a:ext cx="1828800" cy="365760"/>
+          </a:xfrm>
+          <a:prstGeom prst="rect">
+            <a:avLst/>
+          </a:prstGeom>
+          <a:noFill/>
+        </p:spPr>
+        <p:txBody>
+          <a:bodyPr wrap="none">
+            <a:spAutoFit/>
+          </a:bodyPr>
+          <a:lstStyle/>
+          <a:p>
+            <a:r>
+              <a:rPr sz="1600" b="1">
                 <a:latin typeface="Microsoft YaHei"/>
               </a:rPr>
-              <a:t>50% 提效潜力</a:t>
+              <a:t>效率提升 </a:t>
+            </a:r>
+            <a:r>
+              <a:rPr sz="1600" b="1">
+                <a:solidFill>
+                  <a:srgbClr val="2EA154"/>
+                </a:solidFill>
+              </a:rPr>
+              <a:t>↗</a:t>
+            </a:r>
+          </a:p>
+        </p:txBody>
+      </p:sp>
+      <p:sp>
+        <p:nvSpPr>
+          <p:cNvPr id="22" name="TextBox 21"/>
+          <p:cNvSpPr txBox="1"/>
+          <p:nvPr/>
+        </p:nvSpPr>
+        <p:spPr>
+          <a:xfrm>
+            <a:off x="5943600" y="5486400"/>
+            <a:ext cx="2194560" cy="274320"/>
+          </a:xfrm>
+          <a:prstGeom prst="rect">
+            <a:avLst/>
+          </a:prstGeom>
+          <a:noFill/>
+        </p:spPr>
+        <p:txBody>
+          <a:bodyPr wrap="none">
+            <a:spAutoFit/>
+          </a:bodyPr>
+          <a:lstStyle/>
+          <a:p>
+            <a:r>
+              <a:rPr sz="1000">
+                <a:solidFill>
+                  <a:srgbClr val="666666"/>
+                </a:solidFill>
+                <a:latin typeface="Microsoft YaHei"/>
+              </a:rPr>
+              <a:t>Claude Code vs 手写开发</a:t>
+            </a:r>
+          </a:p>
+        </p:txBody>
+      </p:sp>
+      <p:sp>
+        <p:nvSpPr>
+          <p:cNvPr id="23" name="Rounded Rectangle 22"/>
+          <p:cNvSpPr/>
+          <p:nvPr/>
+        </p:nvSpPr>
+        <p:spPr>
+          <a:xfrm>
+            <a:off x="8503920" y="4114800"/>
+            <a:ext cx="3200400" cy="1828800"/>
+          </a:xfrm>
+          <a:prstGeom prst="roundRect">
+            <a:avLst/>
+          </a:prstGeom>
+          <a:solidFill>
+            <a:srgbClr val="FFFFFF"/>
+          </a:solidFill>
+          <a:ln>
+            <a:solidFill>
+              <a:srgbClr val="E5E5E5"/>
+            </a:solidFill>
+          </a:ln>
+        </p:spPr>
+        <p:style>
+          <a:lnRef idx="1">
+            <a:schemeClr val="accent1"/>
+          </a:lnRef>
+          <a:fillRef idx="3">
+            <a:schemeClr val="accent1"/>
+          </a:fillRef>
+          <a:effectRef idx="2">
+            <a:schemeClr val="accent1"/>
+          </a:effectRef>
+          <a:fontRef idx="minor">
+            <a:schemeClr val="lt1"/>
+          </a:fontRef>
+        </p:style>
+        <p:txBody>
+          <a:bodyPr rtlCol="0" anchor="ctr"/>
+          <a:lstStyle/>
+          <a:p>
+            <a:pPr algn="ctr"/>
+          </a:p>
+        </p:txBody>
+      </p:sp>
+      <p:sp>
+        <p:nvSpPr>
+          <p:cNvPr id="24" name="Rectangle 23"/>
+          <p:cNvSpPr/>
+          <p:nvPr/>
+        </p:nvSpPr>
+        <p:spPr>
+          <a:xfrm>
+            <a:off x="10104120" y="4114800"/>
+            <a:ext cx="12700" cy="1828800"/>
+          </a:xfrm>
+          <a:prstGeom prst="rect">
+            <a:avLst/>
+          </a:prstGeom>
+          <a:ln>
+            <a:solidFill>
+              <a:srgbClr val="E5E5E5"/>
+            </a:solidFill>
+          </a:ln>
+        </p:spPr>
+        <p:style>
+          <a:lnRef idx="1">
+            <a:schemeClr val="accent1"/>
+          </a:lnRef>
+          <a:fillRef idx="3">
+            <a:schemeClr val="accent1"/>
+          </a:fillRef>
+          <a:effectRef idx="2">
+            <a:schemeClr val="accent1"/>
+          </a:effectRef>
+          <a:fontRef idx="minor">
+            <a:schemeClr val="lt1"/>
+          </a:fontRef>
+        </p:style>
+        <p:txBody>
+          <a:bodyPr rtlCol="0" anchor="ctr"/>
+          <a:lstStyle/>
+          <a:p>
+            <a:pPr algn="ctr"/>
+          </a:p>
+        </p:txBody>
+      </p:sp>
+      <p:sp>
+        <p:nvSpPr>
+          <p:cNvPr id="25" name="Rectangle 24"/>
+          <p:cNvSpPr/>
+          <p:nvPr/>
+        </p:nvSpPr>
+        <p:spPr>
+          <a:xfrm>
+            <a:off x="8503920" y="5029200"/>
+            <a:ext cx="3200400" cy="12700"/>
+          </a:xfrm>
+          <a:prstGeom prst="rect">
+            <a:avLst/>
+          </a:prstGeom>
+          <a:ln>
+            <a:solidFill>
+              <a:srgbClr val="E5E5E5"/>
+            </a:solidFill>
+          </a:ln>
+        </p:spPr>
+        <p:style>
+          <a:lnRef idx="1">
+            <a:schemeClr val="accent1"/>
+          </a:lnRef>
+          <a:fillRef idx="3">
+            <a:schemeClr val="accent1"/>
+          </a:fillRef>
+          <a:effectRef idx="2">
+            <a:schemeClr val="accent1"/>
+          </a:effectRef>
+          <a:fontRef idx="minor">
+            <a:schemeClr val="lt1"/>
+          </a:fontRef>
+        </p:style>
+        <p:txBody>
+          <a:bodyPr rtlCol="0" anchor="ctr"/>
+          <a:lstStyle/>
+          <a:p>
+            <a:pPr algn="ctr"/>
+          </a:p>
+        </p:txBody>
+      </p:sp>
+      <p:sp>
+        <p:nvSpPr>
+          <p:cNvPr id="26" name="TextBox 25"/>
+          <p:cNvSpPr txBox="1"/>
+          <p:nvPr/>
+        </p:nvSpPr>
+        <p:spPr>
+          <a:xfrm>
+            <a:off x="8503920" y="4206240"/>
+            <a:ext cx="1600200" cy="914400"/>
+          </a:xfrm>
+          <a:prstGeom prst="rect">
+            <a:avLst/>
+          </a:prstGeom>
+          <a:noFill/>
+        </p:spPr>
+        <p:txBody>
+          <a:bodyPr wrap="none">
+            <a:spAutoFit/>
+          </a:bodyPr>
+          <a:lstStyle/>
+          <a:p>
+            <a:pPr algn="ctr"/>
+            <a:r>
+              <a:rPr sz="2400">
+                <a:solidFill>
+                  <a:srgbClr val="D93A36"/>
+                </a:solidFill>
+                <a:latin typeface="Segoe UI Emoji"/>
+              </a:rPr>
+              <a:t>❌
+</a:t>
+            </a:r>
+          </a:p>
+          <a:p>
+            <a:pPr algn="ctr"/>
+            <a:r>
+              <a:rPr sz="1100">
+                <a:solidFill>
+                  <a:srgbClr val="000000"/>
+                </a:solidFill>
+                <a:latin typeface="Microsoft YaHei"/>
+              </a:rPr>
+              <a:t>GitHub Copilot</a:t>
+            </a:r>
+          </a:p>
+        </p:txBody>
+      </p:sp>
+      <p:sp>
+        <p:nvSpPr>
+          <p:cNvPr id="27" name="TextBox 26"/>
+          <p:cNvSpPr txBox="1"/>
+          <p:nvPr/>
+        </p:nvSpPr>
+        <p:spPr>
+          <a:xfrm>
+            <a:off x="10104120" y="4206240"/>
+            <a:ext cx="1600200" cy="914400"/>
+          </a:xfrm>
+          <a:prstGeom prst="rect">
+            <a:avLst/>
+          </a:prstGeom>
+          <a:noFill/>
+        </p:spPr>
+        <p:txBody>
+          <a:bodyPr wrap="none">
+            <a:spAutoFit/>
+          </a:bodyPr>
+          <a:lstStyle/>
+          <a:p>
+            <a:pPr algn="ctr"/>
+            <a:r>
+              <a:rPr sz="2400">
+                <a:solidFill>
+                  <a:srgbClr val="D93A36"/>
+                </a:solidFill>
+                <a:latin typeface="Segoe UI Emoji"/>
+              </a:rPr>
+              <a:t>❌
+</a:t>
+            </a:r>
+          </a:p>
+          <a:p>
+            <a:pPr algn="ctr"/>
+            <a:r>
+              <a:rPr sz="1100">
+                <a:solidFill>
+                  <a:srgbClr val="000000"/>
+                </a:solidFill>
+                <a:latin typeface="Microsoft YaHei"/>
+              </a:rPr>
+              <a:t>Short Dump</a:t>
+            </a:r>
+          </a:p>
+        </p:txBody>
+      </p:sp>
+      <p:sp>
+        <p:nvSpPr>
+          <p:cNvPr id="28" name="TextBox 27"/>
+          <p:cNvSpPr txBox="1"/>
+          <p:nvPr/>
+        </p:nvSpPr>
+        <p:spPr>
+          <a:xfrm>
+            <a:off x="8503920" y="5120640"/>
+            <a:ext cx="1600200" cy="914400"/>
+          </a:xfrm>
+          <a:prstGeom prst="rect">
+            <a:avLst/>
+          </a:prstGeom>
+          <a:noFill/>
+        </p:spPr>
+        <p:txBody>
+          <a:bodyPr wrap="none">
+            <a:spAutoFit/>
+          </a:bodyPr>
+          <a:lstStyle/>
+          <a:p>
+            <a:pPr algn="ctr"/>
+            <a:r>
+              <a:rPr sz="2400">
+                <a:solidFill>
+                  <a:srgbClr val="2EA154"/>
+                </a:solidFill>
+                <a:latin typeface="Segoe UI Emoji"/>
+              </a:rPr>
+              <a:t>✅
+</a:t>
+            </a:r>
+          </a:p>
+          <a:p>
+            <a:pPr algn="ctr"/>
+            <a:r>
+              <a:rPr sz="1100">
+                <a:solidFill>
+                  <a:srgbClr val="000000"/>
+                </a:solidFill>
+                <a:latin typeface="Microsoft YaHei"/>
+              </a:rPr>
+              <a:t>Copilot: 5+ 轮</a:t>
+            </a:r>
+          </a:p>
+        </p:txBody>
+      </p:sp>
+      <p:sp>
+        <p:nvSpPr>
+          <p:cNvPr id="29" name="TextBox 28"/>
+          <p:cNvSpPr txBox="1"/>
+          <p:nvPr/>
+        </p:nvSpPr>
+        <p:spPr>
+          <a:xfrm>
+            <a:off x="10104120" y="5120640"/>
+            <a:ext cx="1600200" cy="914400"/>
+          </a:xfrm>
+          <a:prstGeom prst="rect">
+            <a:avLst/>
+          </a:prstGeom>
+          <a:noFill/>
+        </p:spPr>
+        <p:txBody>
+          <a:bodyPr wrap="none">
+            <a:spAutoFit/>
+          </a:bodyPr>
+          <a:lstStyle/>
+          <a:p>
+            <a:pPr algn="ctr"/>
+            <a:r>
+              <a:rPr sz="2400">
+                <a:solidFill>
+                  <a:srgbClr val="4A86C8"/>
+                </a:solidFill>
+                <a:latin typeface="Segoe UI Emoji"/>
+              </a:rPr>
+              <a:t>👥
+</a:t>
+            </a:r>
+          </a:p>
+          <a:p>
+            <a:pPr algn="ctr"/>
+            <a:r>
+              <a:rPr sz="1100">
+                <a:solidFill>
+                  <a:srgbClr val="000000"/>
+                </a:solidFill>
+                <a:latin typeface="Microsoft YaHei"/>
+              </a:rPr>
+              <a:t>Claude Code: 2 轮</a:t>
+            </a:r>
+          </a:p>
+        </p:txBody>
+      </p:sp>
+      <p:sp>
+        <p:nvSpPr>
+          <p:cNvPr id="30" name="TextBox 29"/>
+          <p:cNvSpPr txBox="1"/>
+          <p:nvPr/>
+        </p:nvSpPr>
+        <p:spPr>
+          <a:xfrm>
+            <a:off x="10789920" y="6309360"/>
+            <a:ext cx="914400" cy="274320"/>
+          </a:xfrm>
+          <a:prstGeom prst="rect">
+            <a:avLst/>
+          </a:prstGeom>
+          <a:noFill/>
+        </p:spPr>
+        <p:txBody>
+          <a:bodyPr wrap="none">
+            <a:spAutoFit/>
+          </a:bodyPr>
+          <a:lstStyle/>
+          <a:p>
+            <a:pPr algn="r"/>
+            <a:r>
+              <a:rPr sz="1000">
+                <a:solidFill>
+                  <a:srgbClr val="999999"/>
+                </a:solidFill>
+                <a:latin typeface="Microsoft YaHei"/>
+              </a:rPr>
+              <a:t>Page 1 / 4</a:t>
             </a:r>
           </a:p>
         </p:txBody>
